--- a/docs/presentation.pptx
+++ b/docs/presentation.pptx
@@ -113,19 +113,19 @@
   <p:extLst>
     <p:ext uri="{521415D9-36F7-43E2-AB2F-B90AF26B5E84}">
       <p14:sectionLst xmlns:p14="http://schemas.microsoft.com/office/powerpoint/2010/main">
-        <p14:section name="Введение" id="{cc3195c7-9f92-e5ea-ae24-55b17b525a01}">
+        <p14:section name="Введение" id="{725452f3-165d-7176-64fa-f0c9d39328b6}">
           <p14:sldIdLst>
             <p14:sldId id="256"/>
             <p14:sldId id="257"/>
           </p14:sldIdLst>
         </p14:section>
-        <p14:section name="Проектирование" id="{ee5e1fdf-caa7-8617-350f-c3786d62ff6b}">
+        <p14:section name="Проектирование" id="{eb549891-8ca1-ed4b-3954-017179cb5faa}">
           <p14:sldIdLst>
             <p14:sldId id="258"/>
             <p14:sldId id="259"/>
           </p14:sldIdLst>
         </p14:section>
-        <p14:section name="Результат" id="{34203794-23a3-521f-a2cc-e3c2dc59318d}">
+        <p14:section name="Результат" id="{3a41fb4c-69ad-b7f8-2a39-99d5a51298e6}">
           <p14:sldIdLst>
             <p14:sldId id="260"/>
             <p14:sldId id="261"/>
@@ -712,7 +712,7 @@
           <a:p>
             <a:r>
               <a:rPr lang="en-US" dirty="0"/>
-              <a:t>В техническом задании 11 функциональных, 6 нефункциональных требований и 6 требований безопасности. По ходу работы заказчик дважды менял требования: попросил проверку занятости мастера и чтобы отмена не удаляла запись, а меняла статус. Оба изменения записаны в журнал. Мы выбрали Waterfall, потому что срок фиксирован и требования известны заранее, а задачи вели на Kanban-доске.</a:t>
+              <a:t>В техническом задании 12 функциональных, 6 нефункциональных требований и 6 требований безопасности. По ходу работы заказчик трижды менял требования: попросил проверку занятости мастера, чтобы отмена не удаляла запись, а меняла статус, и наглядную ленту дня. Все изменения записаны в журнал. Мы выбрали Waterfall, потому что срок фиксирован и требования известны заранее, а задачи вели на Kanban-доске.</a:t>
             </a:r>
             <a:endParaRPr lang="en-US" dirty="0"/>
           </a:p>
@@ -888,7 +888,7 @@
           <a:p>
             <a:r>
               <a:rPr lang="en-US" dirty="0"/>
-              <a:t>Сайт сделан на чистых HTML, CSS и JavaScript и открывается локально двойным щелчком. На скриншоте — раздел «Записи»: слева форма, справа список с поиском, фильтрами и кнопками действий. Статусы выделены цветом, отменённые записи приглушены. Введённый текст выводится как текст, а не как HTML. Данные хранятся в localStorage и не пропадают после перезагрузки.</a:t>
+              <a:t>Сайт сделан на чистых HTML, CSS и JavaScript и открывается локально двойным щелчком. Главная деталь — лента дня: строка на каждого мастера, блок записи длиной в услугу. Наводим курсор — появляется превью интервала, нажимаем — услуга, дата и время подставляются в форму. Ниже форма-талон и журнал, сгруппированный по дням. Оформление — ежедневник: лавандовая полоса, отрывной календарь, при переходе по дням листок отрывается. Цены в тенге, шрифты встроены в Windows. Введённый текст выводится как текст, а не как HTML. Данные хранятся в localStorage и не пропадают после перезагрузки.</a:t>
             </a:r>
             <a:endParaRPr lang="en-US" dirty="0"/>
           </a:p>
@@ -976,7 +976,7 @@
           <a:p>
             <a:r>
               <a:rPr lang="en-US" dirty="0"/>
-              <a:t>Мы составили 15 тестов по требованиям ТЗ: основные операции, проверка полей, занятость мастера, сохранение после перезагрузки, поиск, а также безопасность — HTML-код в комментарии выводится как текст, а при повреждённых данных сайт не падает и сохраняет резервную копию. Все 15 тестов пройдены.</a:t>
+              <a:t>Мы составили 16 тестов по требованиям ТЗ: основные операции, проверка полей, занятость мастера, сохранение после перезагрузки, поиск, лента дня, а также безопасность — HTML-код в комментарии выводится как текст, а при повреждённых данных сайт не падает и сохраняет резервную копию. Пройдено 16 из 16.</a:t>
             </a:r>
             <a:endParaRPr lang="en-US" dirty="0"/>
           </a:p>
@@ -1064,7 +1064,7 @@
           <a:p>
             <a:r>
               <a:rPr lang="en-US" dirty="0"/>
-              <a:t>Сейчас покажем работу сайта: добавим запись, изменим её, отменим или удалим и обновим страницу — данные останутся. Итог: спроектирована и реализована система записи, все требования выполнены, 15 тестов пройдены. Каждый участник коротко рассказывает о своём вкладе. Спасибо за внимание!</a:t>
+              <a:t>Сейчас покажем работу сайта: нажмём на свободное время в ленте и добавим запись, изменим её, отменим или удалим и обновим страницу — данные останутся. Итог: спроектирована и реализована система записи, все требования выполнены, пройдено 16 из 16 тестов. Каждый участник коротко рассказывает о своём вкладе. Спасибо за внимание!</a:t>
             </a:r>
             <a:endParaRPr lang="en-US" dirty="0"/>
           </a:p>
@@ -2168,7 +2168,7 @@
                   <a:schemeClr val="bg2"/>
                 </a:solidFill>
               </a:rPr>
-              <a:t>Главная страница сайта</a:t>
+              <a:t>Главная: лента дня</a:t>
             </a:r>
             <a:endParaRPr lang="en-US" sz="1200" dirty="0"/>
           </a:p>
@@ -3104,7 +3104,7 @@
                   <a:schemeClr val="accent1"/>
                 </a:solidFill>
               </a:rPr>
-              <a:t>11</a:t>
+              <a:t>12</a:t>
             </a:r>
             <a:endParaRPr lang="en-US" sz="4000" dirty="0"/>
           </a:p>
@@ -3377,7 +3377,7 @@
                   <a:schemeClr val="accent1"/>
                 </a:solidFill>
               </a:rPr>
-              <a:t>2</a:t>
+              <a:t>3</a:t>
             </a:r>
             <a:endParaRPr lang="en-US" sz="4000" dirty="0"/>
           </a:p>
@@ -4494,7 +4494,7 @@
                   <a:schemeClr val="tx2"/>
                 </a:solidFill>
               </a:rPr>
-              <a:t>3 раздела</a:t>
+              <a:t>Лента дня</a:t>
             </a:r>
             <a:endParaRPr lang="en-US" sz="1700" dirty="0"/>
           </a:p>
@@ -4508,7 +4508,7 @@
                   <a:schemeClr val="tx1"/>
                 </a:solidFill>
               </a:rPr>
-              <a:t>«Главная» — сводка и услуги, «Записи» — CRUD, «О проекте»</a:t>
+              <a:t>расписание мастеров по часам; щелчок по свободному времени заполняет форму</a:t>
             </a:r>
             <a:endParaRPr lang="en-US" sz="1700" dirty="0"/>
           </a:p>
@@ -4958,7 +4958,7 @@
                   <a:schemeClr val="bg1"/>
                 </a:solidFill>
               </a:rPr>
-              <a:t>15 / 15</a:t>
+              <a:t>16 / 16</a:t>
             </a:r>
             <a:endParaRPr lang="en-US" sz="6600" dirty="0"/>
           </a:p>
@@ -5747,7 +5747,7 @@
                   <a:schemeClr val="tx2"/>
                 </a:solidFill>
               </a:rPr>
-              <a:t>Сохранение и поиск</a:t>
+              <a:t>Сохранение, поиск, лента</a:t>
             </a:r>
             <a:endParaRPr lang="en-US" sz="1600" dirty="0"/>
           </a:p>
@@ -5761,7 +5761,7 @@
                   <a:schemeClr val="tx1"/>
                 </a:solidFill>
               </a:rPr>
-              <a:t>данные после F5, поиск и фильтры</a:t>
+              <a:t>данные после F5, фильтры, выбор времени в ленте</a:t>
             </a:r>
             <a:endParaRPr lang="en-US" sz="1600" dirty="0"/>
           </a:p>
@@ -5775,7 +5775,7 @@
                   <a:schemeClr val="accent1"/>
                 </a:solidFill>
               </a:rPr>
-              <a:t>Т-12, Т-13</a:t>
+              <a:t>Т-12 – Т-14</a:t>
             </a:r>
             <a:endParaRPr lang="en-US" sz="1600" dirty="0"/>
           </a:p>
@@ -5930,7 +5930,7 @@
                   <a:schemeClr val="accent1"/>
                 </a:solidFill>
               </a:rPr>
-              <a:t>Т-14, Т-15</a:t>
+              <a:t>Т-15, Т-16</a:t>
             </a:r>
             <a:endParaRPr lang="en-US" sz="1600" dirty="0"/>
           </a:p>
@@ -6140,7 +6140,7 @@
                   <a:schemeClr val="bg2"/>
                 </a:solidFill>
               </a:rPr>
-              <a:t>запись на завтра, 10:00</a:t>
+              <a:t>щелчком в ленте дня</a:t>
             </a:r>
             <a:endParaRPr lang="en-US" sz="1400" dirty="0"/>
           </a:p>
